--- a/app/ES_Monthly template.pptx
+++ b/app/ES_Monthly template.pptx
@@ -283,21 +283,12 @@
 </p:cmAuthorLst>
 </file>
 
-<file path=ppt/revisionInfo.xml><?xml version="1.0" encoding="utf-8"?>
-<p1510:revInfo xmlns:a="http://schemas.openxmlformats.org/drawingml/2006/main" xmlns:r="http://schemas.openxmlformats.org/officeDocument/2006/relationships" xmlns:p1510="http://schemas.microsoft.com/office/powerpoint/2015/10/main">
-  <p1510:revLst>
-    <p1510:client id="{054DF084-6CD7-41C0-8700-9CF1BA84D36D}" v="8" dt="2026-03-30T09:09:48.425"/>
-    <p1510:client id="{70F4134B-BC88-4C99-9A31-B0CE18C653BE}" v="4" dt="2026-03-30T09:06:02.790"/>
-  </p1510:revLst>
-</p1510:revInfo>
-</file>
-
 <file path=ppt/changesInfos/changesInfo1.xml><?xml version="1.0" encoding="utf-8"?>
 <pc:chgInfo xmlns:a="http://schemas.openxmlformats.org/drawingml/2006/main" xmlns:r="http://schemas.openxmlformats.org/officeDocument/2006/relationships" xmlns:ac="http://schemas.microsoft.com/office/drawing/2013/main/command" xmlns:pc="http://schemas.microsoft.com/office/powerpoint/2013/main/command">
   <pc:docChgLst>
     <pc:chgData name="Safiatou MORO" userId="ddb57cc4-b27a-4e20-a662-fed37f92d3d1" providerId="ADAL" clId="{05BD29F9-DCB6-4BEE-8DED-49FF75B6D9CA}"/>
     <pc:docChg chg="custSel delSld modSld modSection">
-      <pc:chgData name="Safiatou MORO" userId="ddb57cc4-b27a-4e20-a662-fed37f92d3d1" providerId="ADAL" clId="{05BD29F9-DCB6-4BEE-8DED-49FF75B6D9CA}" dt="2026-03-30T09:09:52.995" v="35" actId="478"/>
+      <pc:chgData name="Safiatou MORO" userId="ddb57cc4-b27a-4e20-a662-fed37f92d3d1" providerId="ADAL" clId="{05BD29F9-DCB6-4BEE-8DED-49FF75B6D9CA}" dt="2026-04-21T12:48:40.797" v="58" actId="20577"/>
       <pc:docMkLst>
         <pc:docMk/>
       </pc:docMkLst>
@@ -307,14 +298,6 @@
           <pc:docMk/>
           <pc:sldMk cId="2718454362" sldId="1833"/>
         </pc:sldMkLst>
-        <pc:spChg chg="del">
-          <ac:chgData name="Safiatou MORO" userId="ddb57cc4-b27a-4e20-a662-fed37f92d3d1" providerId="ADAL" clId="{05BD29F9-DCB6-4BEE-8DED-49FF75B6D9CA}" dt="2026-03-30T09:07:47.218" v="11" actId="478"/>
-          <ac:spMkLst>
-            <pc:docMk/>
-            <pc:sldMk cId="2718454362" sldId="1833"/>
-            <ac:spMk id="4" creationId="{B085FC4F-20D6-9F5C-1B6C-6880B1A0F157}"/>
-          </ac:spMkLst>
-        </pc:spChg>
         <pc:spChg chg="add mod">
           <ac:chgData name="Safiatou MORO" userId="ddb57cc4-b27a-4e20-a662-fed37f92d3d1" providerId="ADAL" clId="{05BD29F9-DCB6-4BEE-8DED-49FF75B6D9CA}" dt="2026-03-30T09:07:48.335" v="12"/>
           <ac:spMkLst>
@@ -323,14 +306,6 @@
             <ac:spMk id="6" creationId="{A021F8E4-A062-0B4A-0141-C8FB93A3D9CB}"/>
           </ac:spMkLst>
         </pc:spChg>
-        <pc:picChg chg="del">
-          <ac:chgData name="Safiatou MORO" userId="ddb57cc4-b27a-4e20-a662-fed37f92d3d1" providerId="ADAL" clId="{05BD29F9-DCB6-4BEE-8DED-49FF75B6D9CA}" dt="2026-03-30T09:07:46.402" v="10" actId="478"/>
-          <ac:picMkLst>
-            <pc:docMk/>
-            <pc:sldMk cId="2718454362" sldId="1833"/>
-            <ac:picMk id="9" creationId="{050FF189-06AB-8F9C-89F5-207EB6579093}"/>
-          </ac:picMkLst>
-        </pc:picChg>
       </pc:sldChg>
       <pc:sldChg chg="delSp mod">
         <pc:chgData name="Safiatou MORO" userId="ddb57cc4-b27a-4e20-a662-fed37f92d3d1" providerId="ADAL" clId="{05BD29F9-DCB6-4BEE-8DED-49FF75B6D9CA}" dt="2026-03-30T09:09:52.995" v="35" actId="478"/>
@@ -338,28 +313,21 @@
           <pc:docMk/>
           <pc:sldMk cId="2562130444" sldId="2147472480"/>
         </pc:sldMkLst>
-        <pc:spChg chg="del">
-          <ac:chgData name="Safiatou MORO" userId="ddb57cc4-b27a-4e20-a662-fed37f92d3d1" providerId="ADAL" clId="{05BD29F9-DCB6-4BEE-8DED-49FF75B6D9CA}" dt="2026-03-30T09:09:52.995" v="35" actId="478"/>
+      </pc:sldChg>
+      <pc:sldChg chg="modSp mod">
+        <pc:chgData name="Safiatou MORO" userId="ddb57cc4-b27a-4e20-a662-fed37f92d3d1" providerId="ADAL" clId="{05BD29F9-DCB6-4BEE-8DED-49FF75B6D9CA}" dt="2026-03-31T08:19:26.676" v="46"/>
+        <pc:sldMkLst>
+          <pc:docMk/>
+          <pc:sldMk cId="469219715" sldId="2147472843"/>
+        </pc:sldMkLst>
+        <pc:spChg chg="mod">
+          <ac:chgData name="Safiatou MORO" userId="ddb57cc4-b27a-4e20-a662-fed37f92d3d1" providerId="ADAL" clId="{05BD29F9-DCB6-4BEE-8DED-49FF75B6D9CA}" dt="2026-03-31T08:19:26.676" v="46"/>
           <ac:spMkLst>
             <pc:docMk/>
-            <pc:sldMk cId="2562130444" sldId="2147472480"/>
-            <ac:spMk id="2" creationId="{AD65C219-1FA6-E08C-49C9-3512F7F788CE}"/>
+            <pc:sldMk cId="469219715" sldId="2147472843"/>
+            <ac:spMk id="10" creationId="{0CD54A75-E4E8-9140-036D-29B61CAE5F23}"/>
           </ac:spMkLst>
         </pc:spChg>
-      </pc:sldChg>
-      <pc:sldChg chg="del">
-        <pc:chgData name="Safiatou MORO" userId="ddb57cc4-b27a-4e20-a662-fed37f92d3d1" providerId="ADAL" clId="{05BD29F9-DCB6-4BEE-8DED-49FF75B6D9CA}" dt="2026-03-30T09:06:31.947" v="8" actId="47"/>
-        <pc:sldMkLst>
-          <pc:docMk/>
-          <pc:sldMk cId="3874956417" sldId="2147472861"/>
-        </pc:sldMkLst>
-      </pc:sldChg>
-      <pc:sldChg chg="del">
-        <pc:chgData name="Safiatou MORO" userId="ddb57cc4-b27a-4e20-a662-fed37f92d3d1" providerId="ADAL" clId="{05BD29F9-DCB6-4BEE-8DED-49FF75B6D9CA}" dt="2026-03-30T09:06:32.616" v="9" actId="47"/>
-        <pc:sldMkLst>
-          <pc:docMk/>
-          <pc:sldMk cId="3917412120" sldId="2147472863"/>
-        </pc:sldMkLst>
       </pc:sldChg>
       <pc:sldChg chg="addSp delSp modSp mod">
         <pc:chgData name="Safiatou MORO" userId="ddb57cc4-b27a-4e20-a662-fed37f92d3d1" providerId="ADAL" clId="{05BD29F9-DCB6-4BEE-8DED-49FF75B6D9CA}" dt="2026-03-30T09:07:53.989" v="15"/>
@@ -367,14 +335,6 @@
           <pc:docMk/>
           <pc:sldMk cId="2945377139" sldId="2147472873"/>
         </pc:sldMkLst>
-        <pc:spChg chg="del">
-          <ac:chgData name="Safiatou MORO" userId="ddb57cc4-b27a-4e20-a662-fed37f92d3d1" providerId="ADAL" clId="{05BD29F9-DCB6-4BEE-8DED-49FF75B6D9CA}" dt="2026-03-30T09:07:52.705" v="14" actId="478"/>
-          <ac:spMkLst>
-            <pc:docMk/>
-            <pc:sldMk cId="2945377139" sldId="2147472873"/>
-            <ac:spMk id="4" creationId="{06322B44-BFE7-4104-F57F-6DE1ECB854C1}"/>
-          </ac:spMkLst>
-        </pc:spChg>
         <pc:spChg chg="add mod">
           <ac:chgData name="Safiatou MORO" userId="ddb57cc4-b27a-4e20-a662-fed37f92d3d1" providerId="ADAL" clId="{05BD29F9-DCB6-4BEE-8DED-49FF75B6D9CA}" dt="2026-03-30T09:07:53.989" v="15"/>
           <ac:spMkLst>
@@ -383,14 +343,6 @@
             <ac:spMk id="6" creationId="{EF31961E-56DC-6924-76B1-1E009EE55833}"/>
           </ac:spMkLst>
         </pc:spChg>
-        <pc:picChg chg="del">
-          <ac:chgData name="Safiatou MORO" userId="ddb57cc4-b27a-4e20-a662-fed37f92d3d1" providerId="ADAL" clId="{05BD29F9-DCB6-4BEE-8DED-49FF75B6D9CA}" dt="2026-03-30T09:07:51.583" v="13" actId="478"/>
-          <ac:picMkLst>
-            <pc:docMk/>
-            <pc:sldMk cId="2945377139" sldId="2147472873"/>
-            <ac:picMk id="9" creationId="{477581DF-8677-1B5A-A38C-D6C02EE5EA60}"/>
-          </ac:picMkLst>
-        </pc:picChg>
       </pc:sldChg>
       <pc:sldChg chg="addSp modSp mod">
         <pc:chgData name="Safiatou MORO" userId="ddb57cc4-b27a-4e20-a662-fed37f92d3d1" providerId="ADAL" clId="{05BD29F9-DCB6-4BEE-8DED-49FF75B6D9CA}" dt="2026-03-30T09:09:36.793" v="30" actId="13926"/>
@@ -429,38 +381,6 @@
             <ac:spMk id="10" creationId="{ED7E5677-BF12-53DF-CC69-48C4BBD89C6A}"/>
           </ac:spMkLst>
         </pc:spChg>
-        <pc:picChg chg="del">
-          <ac:chgData name="Safiatou MORO" userId="ddb57cc4-b27a-4e20-a662-fed37f92d3d1" providerId="ADAL" clId="{05BD29F9-DCB6-4BEE-8DED-49FF75B6D9CA}" dt="2026-03-30T09:08:24.804" v="16" actId="478"/>
-          <ac:picMkLst>
-            <pc:docMk/>
-            <pc:sldMk cId="1126233307" sldId="2147472945"/>
-            <ac:picMk id="4" creationId="{97DB8240-6F39-8110-15D7-388C5B7013EA}"/>
-          </ac:picMkLst>
-        </pc:picChg>
-        <pc:picChg chg="del">
-          <ac:chgData name="Safiatou MORO" userId="ddb57cc4-b27a-4e20-a662-fed37f92d3d1" providerId="ADAL" clId="{05BD29F9-DCB6-4BEE-8DED-49FF75B6D9CA}" dt="2026-03-30T09:08:24.804" v="16" actId="478"/>
-          <ac:picMkLst>
-            <pc:docMk/>
-            <pc:sldMk cId="1126233307" sldId="2147472945"/>
-            <ac:picMk id="8" creationId="{C6CB2A74-6026-1867-E2BF-1FD3DF2318F0}"/>
-          </ac:picMkLst>
-        </pc:picChg>
-        <pc:picChg chg="del">
-          <ac:chgData name="Safiatou MORO" userId="ddb57cc4-b27a-4e20-a662-fed37f92d3d1" providerId="ADAL" clId="{05BD29F9-DCB6-4BEE-8DED-49FF75B6D9CA}" dt="2026-03-30T09:08:34.028" v="18" actId="478"/>
-          <ac:picMkLst>
-            <pc:docMk/>
-            <pc:sldMk cId="1126233307" sldId="2147472945"/>
-            <ac:picMk id="9" creationId="{2F3D5B4C-A963-9CCD-40B9-9E932A5C915F}"/>
-          </ac:picMkLst>
-        </pc:picChg>
-        <pc:picChg chg="del">
-          <ac:chgData name="Safiatou MORO" userId="ddb57cc4-b27a-4e20-a662-fed37f92d3d1" providerId="ADAL" clId="{05BD29F9-DCB6-4BEE-8DED-49FF75B6D9CA}" dt="2026-03-30T09:08:33.432" v="17" actId="478"/>
-          <ac:picMkLst>
-            <pc:docMk/>
-            <pc:sldMk cId="1126233307" sldId="2147472945"/>
-            <ac:picMk id="11" creationId="{4622607A-C33A-8824-3830-81CFF19E9FA4}"/>
-          </ac:picMkLst>
-        </pc:picChg>
       </pc:sldChg>
       <pc:sldChg chg="addSp delSp modSp mod">
         <pc:chgData name="Safiatou MORO" userId="ddb57cc4-b27a-4e20-a662-fed37f92d3d1" providerId="ADAL" clId="{05BD29F9-DCB6-4BEE-8DED-49FF75B6D9CA}" dt="2026-03-30T09:08:50.939" v="22"/>
@@ -468,14 +388,6 @@
           <pc:docMk/>
           <pc:sldMk cId="3074469389" sldId="2147472947"/>
         </pc:sldMkLst>
-        <pc:spChg chg="del">
-          <ac:chgData name="Safiatou MORO" userId="ddb57cc4-b27a-4e20-a662-fed37f92d3d1" providerId="ADAL" clId="{05BD29F9-DCB6-4BEE-8DED-49FF75B6D9CA}" dt="2026-03-30T09:08:44.275" v="20" actId="478"/>
-          <ac:spMkLst>
-            <pc:docMk/>
-            <pc:sldMk cId="3074469389" sldId="2147472947"/>
-            <ac:spMk id="6" creationId="{66F975D8-B316-8DA4-A49D-9EF6EE26DC91}"/>
-          </ac:spMkLst>
-        </pc:spChg>
         <pc:spChg chg="add mod">
           <ac:chgData name="Safiatou MORO" userId="ddb57cc4-b27a-4e20-a662-fed37f92d3d1" providerId="ADAL" clId="{05BD29F9-DCB6-4BEE-8DED-49FF75B6D9CA}" dt="2026-03-30T09:08:50.939" v="22"/>
           <ac:spMkLst>
@@ -484,54 +396,6 @@
             <ac:spMk id="11" creationId="{A6DB71C4-0162-73AA-DB04-8932BA9E70E0}"/>
           </ac:spMkLst>
         </pc:spChg>
-        <pc:picChg chg="del">
-          <ac:chgData name="Safiatou MORO" userId="ddb57cc4-b27a-4e20-a662-fed37f92d3d1" providerId="ADAL" clId="{05BD29F9-DCB6-4BEE-8DED-49FF75B6D9CA}" dt="2026-03-30T09:08:44.275" v="20" actId="478"/>
-          <ac:picMkLst>
-            <pc:docMk/>
-            <pc:sldMk cId="3074469389" sldId="2147472947"/>
-            <ac:picMk id="4" creationId="{D2B0DBDA-89BF-3D21-AC73-1246BCEACB0D}"/>
-          </ac:picMkLst>
-        </pc:picChg>
-        <pc:picChg chg="del">
-          <ac:chgData name="Safiatou MORO" userId="ddb57cc4-b27a-4e20-a662-fed37f92d3d1" providerId="ADAL" clId="{05BD29F9-DCB6-4BEE-8DED-49FF75B6D9CA}" dt="2026-03-30T09:08:44.275" v="20" actId="478"/>
-          <ac:picMkLst>
-            <pc:docMk/>
-            <pc:sldMk cId="3074469389" sldId="2147472947"/>
-            <ac:picMk id="8" creationId="{5F1889AB-7223-1108-B68A-DBB595D14438}"/>
-          </ac:picMkLst>
-        </pc:picChg>
-        <pc:picChg chg="del">
-          <ac:chgData name="Safiatou MORO" userId="ddb57cc4-b27a-4e20-a662-fed37f92d3d1" providerId="ADAL" clId="{05BD29F9-DCB6-4BEE-8DED-49FF75B6D9CA}" dt="2026-03-30T09:08:44.275" v="20" actId="478"/>
-          <ac:picMkLst>
-            <pc:docMk/>
-            <pc:sldMk cId="3074469389" sldId="2147472947"/>
-            <ac:picMk id="9" creationId="{4A1F8271-8100-C4B3-3541-DA28A3C416AF}"/>
-          </ac:picMkLst>
-        </pc:picChg>
-        <pc:picChg chg="del">
-          <ac:chgData name="Safiatou MORO" userId="ddb57cc4-b27a-4e20-a662-fed37f92d3d1" providerId="ADAL" clId="{05BD29F9-DCB6-4BEE-8DED-49FF75B6D9CA}" dt="2026-03-30T09:08:45.987" v="21" actId="478"/>
-          <ac:picMkLst>
-            <pc:docMk/>
-            <pc:sldMk cId="3074469389" sldId="2147472947"/>
-            <ac:picMk id="10" creationId="{EC5360B9-5BBA-8B61-12F3-B4D395354E4B}"/>
-          </ac:picMkLst>
-        </pc:picChg>
-        <pc:picChg chg="del">
-          <ac:chgData name="Safiatou MORO" userId="ddb57cc4-b27a-4e20-a662-fed37f92d3d1" providerId="ADAL" clId="{05BD29F9-DCB6-4BEE-8DED-49FF75B6D9CA}" dt="2026-03-30T09:08:44.275" v="20" actId="478"/>
-          <ac:picMkLst>
-            <pc:docMk/>
-            <pc:sldMk cId="3074469389" sldId="2147472947"/>
-            <ac:picMk id="12" creationId="{F41F1C5F-5881-8C9B-9662-A398441FAE99}"/>
-          </ac:picMkLst>
-        </pc:picChg>
-        <pc:picChg chg="del">
-          <ac:chgData name="Safiatou MORO" userId="ddb57cc4-b27a-4e20-a662-fed37f92d3d1" providerId="ADAL" clId="{05BD29F9-DCB6-4BEE-8DED-49FF75B6D9CA}" dt="2026-03-30T09:08:44.275" v="20" actId="478"/>
-          <ac:picMkLst>
-            <pc:docMk/>
-            <pc:sldMk cId="3074469389" sldId="2147472947"/>
-            <ac:picMk id="16" creationId="{EEA83059-41B6-42AA-3F1C-17C63ABD78BB}"/>
-          </ac:picMkLst>
-        </pc:picChg>
       </pc:sldChg>
       <pc:sldChg chg="modSp mod modNotesTx">
         <pc:chgData name="Safiatou MORO" userId="ddb57cc4-b27a-4e20-a662-fed37f92d3d1" providerId="ADAL" clId="{05BD29F9-DCB6-4BEE-8DED-49FF75B6D9CA}" dt="2026-03-30T09:09:07.572" v="25" actId="20577"/>
@@ -647,20 +511,155 @@
           </ac:spMkLst>
         </pc:spChg>
       </pc:sldChg>
+      <pc:sldChg chg="modSp mod">
+        <pc:chgData name="Safiatou MORO" userId="ddb57cc4-b27a-4e20-a662-fed37f92d3d1" providerId="ADAL" clId="{05BD29F9-DCB6-4BEE-8DED-49FF75B6D9CA}" dt="2026-03-31T08:19:31.325" v="48" actId="20577"/>
+        <pc:sldMkLst>
+          <pc:docMk/>
+          <pc:sldMk cId="1991886015" sldId="2147473066"/>
+        </pc:sldMkLst>
+        <pc:spChg chg="mod">
+          <ac:chgData name="Safiatou MORO" userId="ddb57cc4-b27a-4e20-a662-fed37f92d3d1" providerId="ADAL" clId="{05BD29F9-DCB6-4BEE-8DED-49FF75B6D9CA}" dt="2026-03-31T08:19:31.325" v="48" actId="20577"/>
+          <ac:spMkLst>
+            <pc:docMk/>
+            <pc:sldMk cId="1991886015" sldId="2147473066"/>
+            <ac:spMk id="12" creationId="{EF466CDF-6A9B-8C0D-2D19-D056C35B74F1}"/>
+          </ac:spMkLst>
+        </pc:spChg>
+      </pc:sldChg>
+      <pc:sldChg chg="modSp mod">
+        <pc:chgData name="Safiatou MORO" userId="ddb57cc4-b27a-4e20-a662-fed37f92d3d1" providerId="ADAL" clId="{05BD29F9-DCB6-4BEE-8DED-49FF75B6D9CA}" dt="2026-03-31T08:19:36.160" v="50" actId="20577"/>
+        <pc:sldMkLst>
+          <pc:docMk/>
+          <pc:sldMk cId="1153292060" sldId="2147473067"/>
+        </pc:sldMkLst>
+        <pc:spChg chg="mod">
+          <ac:chgData name="Safiatou MORO" userId="ddb57cc4-b27a-4e20-a662-fed37f92d3d1" providerId="ADAL" clId="{05BD29F9-DCB6-4BEE-8DED-49FF75B6D9CA}" dt="2026-03-31T08:19:36.160" v="50" actId="20577"/>
+          <ac:spMkLst>
+            <pc:docMk/>
+            <pc:sldMk cId="1153292060" sldId="2147473067"/>
+            <ac:spMk id="7" creationId="{9A510615-111A-EE6B-934D-70FEF33E7A09}"/>
+          </ac:spMkLst>
+        </pc:spChg>
+      </pc:sldChg>
+      <pc:sldChg chg="modSp mod">
+        <pc:chgData name="Safiatou MORO" userId="ddb57cc4-b27a-4e20-a662-fed37f92d3d1" providerId="ADAL" clId="{05BD29F9-DCB6-4BEE-8DED-49FF75B6D9CA}" dt="2026-03-31T08:19:26.676" v="46"/>
+        <pc:sldMkLst>
+          <pc:docMk/>
+          <pc:sldMk cId="173147260" sldId="2147473084"/>
+        </pc:sldMkLst>
+        <pc:spChg chg="mod">
+          <ac:chgData name="Safiatou MORO" userId="ddb57cc4-b27a-4e20-a662-fed37f92d3d1" providerId="ADAL" clId="{05BD29F9-DCB6-4BEE-8DED-49FF75B6D9CA}" dt="2026-03-31T08:19:26.676" v="46"/>
+          <ac:spMkLst>
+            <pc:docMk/>
+            <pc:sldMk cId="173147260" sldId="2147473084"/>
+            <ac:spMk id="11" creationId="{84B862F5-2B8B-DA67-63CF-58D9E217BB39}"/>
+          </ac:spMkLst>
+        </pc:spChg>
+      </pc:sldChg>
+      <pc:sldChg chg="modSp mod">
+        <pc:chgData name="Safiatou MORO" userId="ddb57cc4-b27a-4e20-a662-fed37f92d3d1" providerId="ADAL" clId="{05BD29F9-DCB6-4BEE-8DED-49FF75B6D9CA}" dt="2026-03-31T08:19:26.676" v="46"/>
+        <pc:sldMkLst>
+          <pc:docMk/>
+          <pc:sldMk cId="1494010951" sldId="2147473088"/>
+        </pc:sldMkLst>
+        <pc:spChg chg="mod">
+          <ac:chgData name="Safiatou MORO" userId="ddb57cc4-b27a-4e20-a662-fed37f92d3d1" providerId="ADAL" clId="{05BD29F9-DCB6-4BEE-8DED-49FF75B6D9CA}" dt="2026-03-31T08:19:26.676" v="46"/>
+          <ac:spMkLst>
+            <pc:docMk/>
+            <pc:sldMk cId="1494010951" sldId="2147473088"/>
+            <ac:spMk id="11" creationId="{125344D9-B6F1-E1C8-1519-12185F9AB80E}"/>
+          </ac:spMkLst>
+        </pc:spChg>
+      </pc:sldChg>
+      <pc:sldChg chg="modSp mod">
+        <pc:chgData name="Safiatou MORO" userId="ddb57cc4-b27a-4e20-a662-fed37f92d3d1" providerId="ADAL" clId="{05BD29F9-DCB6-4BEE-8DED-49FF75B6D9CA}" dt="2026-03-31T08:19:26.676" v="46"/>
+        <pc:sldMkLst>
+          <pc:docMk/>
+          <pc:sldMk cId="648781752" sldId="2147473092"/>
+        </pc:sldMkLst>
+        <pc:spChg chg="mod">
+          <ac:chgData name="Safiatou MORO" userId="ddb57cc4-b27a-4e20-a662-fed37f92d3d1" providerId="ADAL" clId="{05BD29F9-DCB6-4BEE-8DED-49FF75B6D9CA}" dt="2026-03-31T08:19:26.676" v="46"/>
+          <ac:spMkLst>
+            <pc:docMk/>
+            <pc:sldMk cId="648781752" sldId="2147473092"/>
+            <ac:spMk id="11" creationId="{8559C0BC-E778-E1C0-04F8-CC58DD3EB014}"/>
+          </ac:spMkLst>
+        </pc:spChg>
+      </pc:sldChg>
+      <pc:sldChg chg="modSp mod">
+        <pc:chgData name="Safiatou MORO" userId="ddb57cc4-b27a-4e20-a662-fed37f92d3d1" providerId="ADAL" clId="{05BD29F9-DCB6-4BEE-8DED-49FF75B6D9CA}" dt="2026-03-30T12:06:52.490" v="45" actId="20577"/>
+        <pc:sldMkLst>
+          <pc:docMk/>
+          <pc:sldMk cId="1230632136" sldId="2147473096"/>
+        </pc:sldMkLst>
+        <pc:spChg chg="mod">
+          <ac:chgData name="Safiatou MORO" userId="ddb57cc4-b27a-4e20-a662-fed37f92d3d1" providerId="ADAL" clId="{05BD29F9-DCB6-4BEE-8DED-49FF75B6D9CA}" dt="2026-03-30T12:06:52.490" v="45" actId="20577"/>
+          <ac:spMkLst>
+            <pc:docMk/>
+            <pc:sldMk cId="1230632136" sldId="2147473096"/>
+            <ac:spMk id="11" creationId="{28FCEE22-E5D5-A612-5D2C-B208A9821CEA}"/>
+          </ac:spMkLst>
+        </pc:spChg>
+      </pc:sldChg>
+      <pc:sldChg chg="modSp mod">
+        <pc:chgData name="Safiatou MORO" userId="ddb57cc4-b27a-4e20-a662-fed37f92d3d1" providerId="ADAL" clId="{05BD29F9-DCB6-4BEE-8DED-49FF75B6D9CA}" dt="2026-04-21T12:48:28.978" v="54" actId="20577"/>
+        <pc:sldMkLst>
+          <pc:docMk/>
+          <pc:sldMk cId="3017814414" sldId="2147473100"/>
+        </pc:sldMkLst>
+        <pc:spChg chg="mod">
+          <ac:chgData name="Safiatou MORO" userId="ddb57cc4-b27a-4e20-a662-fed37f92d3d1" providerId="ADAL" clId="{05BD29F9-DCB6-4BEE-8DED-49FF75B6D9CA}" dt="2026-04-21T12:48:28.978" v="54" actId="20577"/>
+          <ac:spMkLst>
+            <pc:docMk/>
+            <pc:sldMk cId="3017814414" sldId="2147473100"/>
+            <ac:spMk id="11" creationId="{7A3DCF41-4F5F-C99A-8435-C7931873EB1F}"/>
+          </ac:spMkLst>
+        </pc:spChg>
+      </pc:sldChg>
+      <pc:sldChg chg="modSp mod">
+        <pc:chgData name="Safiatou MORO" userId="ddb57cc4-b27a-4e20-a662-fed37f92d3d1" providerId="ADAL" clId="{05BD29F9-DCB6-4BEE-8DED-49FF75B6D9CA}" dt="2026-04-21T12:48:34.945" v="56" actId="20577"/>
+        <pc:sldMkLst>
+          <pc:docMk/>
+          <pc:sldMk cId="1371344053" sldId="2147473104"/>
+        </pc:sldMkLst>
+        <pc:spChg chg="mod">
+          <ac:chgData name="Safiatou MORO" userId="ddb57cc4-b27a-4e20-a662-fed37f92d3d1" providerId="ADAL" clId="{05BD29F9-DCB6-4BEE-8DED-49FF75B6D9CA}" dt="2026-04-21T12:48:34.945" v="56" actId="20577"/>
+          <ac:spMkLst>
+            <pc:docMk/>
+            <pc:sldMk cId="1371344053" sldId="2147473104"/>
+            <ac:spMk id="11" creationId="{DC38E9FA-254F-C2D8-2E55-BD4451965E18}"/>
+          </ac:spMkLst>
+        </pc:spChg>
+      </pc:sldChg>
+      <pc:sldChg chg="modSp mod">
+        <pc:chgData name="Safiatou MORO" userId="ddb57cc4-b27a-4e20-a662-fed37f92d3d1" providerId="ADAL" clId="{05BD29F9-DCB6-4BEE-8DED-49FF75B6D9CA}" dt="2026-04-21T12:48:22.762" v="52" actId="20577"/>
+        <pc:sldMkLst>
+          <pc:docMk/>
+          <pc:sldMk cId="1019483770" sldId="2147473108"/>
+        </pc:sldMkLst>
+        <pc:spChg chg="mod">
+          <ac:chgData name="Safiatou MORO" userId="ddb57cc4-b27a-4e20-a662-fed37f92d3d1" providerId="ADAL" clId="{05BD29F9-DCB6-4BEE-8DED-49FF75B6D9CA}" dt="2026-04-21T12:48:22.762" v="52" actId="20577"/>
+          <ac:spMkLst>
+            <pc:docMk/>
+            <pc:sldMk cId="1019483770" sldId="2147473108"/>
+            <ac:spMk id="11" creationId="{4EC18AAF-20E2-0057-60BA-A465B416524E}"/>
+          </ac:spMkLst>
+        </pc:spChg>
+      </pc:sldChg>
       <pc:sldChg chg="addSp delSp modSp mod">
-        <pc:chgData name="Safiatou MORO" userId="ddb57cc4-b27a-4e20-a662-fed37f92d3d1" providerId="ADAL" clId="{05BD29F9-DCB6-4BEE-8DED-49FF75B6D9CA}" dt="2026-03-30T09:05:49.602" v="1"/>
+        <pc:chgData name="Safiatou MORO" userId="ddb57cc4-b27a-4e20-a662-fed37f92d3d1" providerId="ADAL" clId="{05BD29F9-DCB6-4BEE-8DED-49FF75B6D9CA}" dt="2026-04-21T12:48:40.797" v="58" actId="20577"/>
         <pc:sldMkLst>
           <pc:docMk/>
           <pc:sldMk cId="762314960" sldId="2147473112"/>
         </pc:sldMkLst>
-        <pc:picChg chg="del">
-          <ac:chgData name="Safiatou MORO" userId="ddb57cc4-b27a-4e20-a662-fed37f92d3d1" providerId="ADAL" clId="{05BD29F9-DCB6-4BEE-8DED-49FF75B6D9CA}" dt="2026-03-30T09:05:48.835" v="0" actId="478"/>
-          <ac:picMkLst>
+        <pc:spChg chg="mod">
+          <ac:chgData name="Safiatou MORO" userId="ddb57cc4-b27a-4e20-a662-fed37f92d3d1" providerId="ADAL" clId="{05BD29F9-DCB6-4BEE-8DED-49FF75B6D9CA}" dt="2026-04-21T12:48:40.797" v="58" actId="20577"/>
+          <ac:spMkLst>
             <pc:docMk/>
             <pc:sldMk cId="762314960" sldId="2147473112"/>
-            <ac:picMk id="7" creationId="{812C862F-990B-5CD8-D640-DA9074B4BF7F}"/>
-          </ac:picMkLst>
-        </pc:picChg>
+            <ac:spMk id="11" creationId="{412F41FA-C336-F57B-1B67-172588068A28}"/>
+          </ac:spMkLst>
+        </pc:spChg>
         <pc:picChg chg="add mod">
           <ac:chgData name="Safiatou MORO" userId="ddb57cc4-b27a-4e20-a662-fed37f92d3d1" providerId="ADAL" clId="{05BD29F9-DCB6-4BEE-8DED-49FF75B6D9CA}" dt="2026-03-30T09:05:49.602" v="1"/>
           <ac:picMkLst>
@@ -676,14 +675,6 @@
           <pc:docMk/>
           <pc:sldMk cId="3917613289" sldId="2147473113"/>
         </pc:sldMkLst>
-        <pc:picChg chg="del">
-          <ac:chgData name="Safiatou MORO" userId="ddb57cc4-b27a-4e20-a662-fed37f92d3d1" providerId="ADAL" clId="{05BD29F9-DCB6-4BEE-8DED-49FF75B6D9CA}" dt="2026-03-30T09:05:54.415" v="2" actId="478"/>
-          <ac:picMkLst>
-            <pc:docMk/>
-            <pc:sldMk cId="3917613289" sldId="2147473113"/>
-            <ac:picMk id="5" creationId="{01AE7F54-0594-A50F-04BA-65DFB5EA0AF2}"/>
-          </ac:picMkLst>
-        </pc:picChg>
         <pc:picChg chg="add mod">
           <ac:chgData name="Safiatou MORO" userId="ddb57cc4-b27a-4e20-a662-fed37f92d3d1" providerId="ADAL" clId="{05BD29F9-DCB6-4BEE-8DED-49FF75B6D9CA}" dt="2026-03-30T09:05:55.413" v="3"/>
           <ac:picMkLst>
@@ -699,14 +690,6 @@
           <pc:docMk/>
           <pc:sldMk cId="3545799914" sldId="2147473114"/>
         </pc:sldMkLst>
-        <pc:picChg chg="del">
-          <ac:chgData name="Safiatou MORO" userId="ddb57cc4-b27a-4e20-a662-fed37f92d3d1" providerId="ADAL" clId="{05BD29F9-DCB6-4BEE-8DED-49FF75B6D9CA}" dt="2026-03-30T09:05:58.457" v="4" actId="478"/>
-          <ac:picMkLst>
-            <pc:docMk/>
-            <pc:sldMk cId="3545799914" sldId="2147473114"/>
-            <ac:picMk id="5" creationId="{9D474B4C-1751-8185-BB72-300E20374200}"/>
-          </ac:picMkLst>
-        </pc:picChg>
         <pc:picChg chg="add mod">
           <ac:chgData name="Safiatou MORO" userId="ddb57cc4-b27a-4e20-a662-fed37f92d3d1" providerId="ADAL" clId="{05BD29F9-DCB6-4BEE-8DED-49FF75B6D9CA}" dt="2026-03-30T09:05:59.152" v="5"/>
           <ac:picMkLst>
@@ -722,14 +705,6 @@
           <pc:docMk/>
           <pc:sldMk cId="2386696535" sldId="2147473115"/>
         </pc:sldMkLst>
-        <pc:picChg chg="del">
-          <ac:chgData name="Safiatou MORO" userId="ddb57cc4-b27a-4e20-a662-fed37f92d3d1" providerId="ADAL" clId="{05BD29F9-DCB6-4BEE-8DED-49FF75B6D9CA}" dt="2026-03-30T09:06:02.281" v="6" actId="478"/>
-          <ac:picMkLst>
-            <pc:docMk/>
-            <pc:sldMk cId="2386696535" sldId="2147473115"/>
-            <ac:picMk id="5" creationId="{322237F0-BA54-1632-4B2C-3A04778751F9}"/>
-          </ac:picMkLst>
-        </pc:picChg>
         <pc:picChg chg="add mod">
           <ac:chgData name="Safiatou MORO" userId="ddb57cc4-b27a-4e20-a662-fed37f92d3d1" providerId="ADAL" clId="{05BD29F9-DCB6-4BEE-8DED-49FF75B6D9CA}" dt="2026-03-30T09:06:02.790" v="7"/>
           <ac:picMkLst>
@@ -838,7 +813,7 @@
           <a:p>
             <a:fld id="{8C878338-E163-4C54-9561-D6E9738BEB8B}" type="datetime1">
               <a:rPr lang="fr-FR" smtClean="0"/>
-              <a:t>30/03/2026</a:t>
+              <a:t>21/04/2026</a:t>
             </a:fld>
             <a:endParaRPr lang="fr-FR"/>
           </a:p>
@@ -1016,7 +991,7 @@
           <a:p>
             <a:fld id="{A35F4535-3591-4AAD-9289-106FE70D9FD8}" type="datetime1">
               <a:rPr lang="fr-FR" smtClean="0"/>
-              <a:t>30/03/2026</a:t>
+              <a:t>21/04/2026</a:t>
             </a:fld>
             <a:endParaRPr lang="fr-FR"/>
           </a:p>
@@ -1404,7 +1379,7 @@
           <a:p>
             <a:fld id="{4A36E841-AC53-4358-B08C-CEB57C3A490E}" type="datetime1">
               <a:rPr lang="fr-FR" smtClean="0"/>
-              <a:t>30/03/2026</a:t>
+              <a:t>21/04/2026</a:t>
             </a:fld>
             <a:endParaRPr lang="fr-FR"/>
           </a:p>
@@ -1702,7 +1677,7 @@
           <a:p>
             <a:fld id="{96644B93-F9AB-49B6-8AE8-03D43A9E344C}" type="datetime1">
               <a:rPr lang="fr-FR" smtClean="0"/>
-              <a:t>30/03/2026</a:t>
+              <a:t>21/04/2026</a:t>
             </a:fld>
             <a:endParaRPr lang="fr-FR"/>
           </a:p>
@@ -2110,7 +2085,7 @@
           <a:p>
             <a:fld id="{96644B93-F9AB-49B6-8AE8-03D43A9E344C}" type="datetime1">
               <a:rPr lang="fr-FR" smtClean="0"/>
-              <a:t>30/03/2026</a:t>
+              <a:t>21/04/2026</a:t>
             </a:fld>
             <a:endParaRPr lang="fr-FR"/>
           </a:p>
@@ -2272,7 +2247,7 @@
           <a:p>
             <a:fld id="{96644B93-F9AB-49B6-8AE8-03D43A9E344C}" type="datetime1">
               <a:rPr lang="fr-FR" smtClean="0"/>
-              <a:t>30/03/2026</a:t>
+              <a:t>21/04/2026</a:t>
             </a:fld>
             <a:endParaRPr lang="fr-FR"/>
           </a:p>
@@ -2434,7 +2409,7 @@
           <a:p>
             <a:fld id="{96644B93-F9AB-49B6-8AE8-03D43A9E344C}" type="datetime1">
               <a:rPr lang="fr-FR" smtClean="0"/>
-              <a:t>30/03/2026</a:t>
+              <a:t>21/04/2026</a:t>
             </a:fld>
             <a:endParaRPr lang="fr-FR"/>
           </a:p>
@@ -2542,7 +2517,7 @@
           <a:p>
             <a:fld id="{A35F4535-3591-4AAD-9289-106FE70D9FD8}" type="datetime1">
               <a:rPr lang="fr-FR" smtClean="0"/>
-              <a:t>30/03/2026</a:t>
+              <a:t>21/04/2026</a:t>
             </a:fld>
             <a:endParaRPr lang="fr-FR"/>
           </a:p>
@@ -2758,7 +2733,7 @@
           <a:p>
             <a:fld id="{96644B93-F9AB-49B6-8AE8-03D43A9E344C}" type="datetime1">
               <a:rPr lang="fr-FR" smtClean="0"/>
-              <a:t>30/03/2026</a:t>
+              <a:t>21/04/2026</a:t>
             </a:fld>
             <a:endParaRPr lang="fr-FR"/>
           </a:p>
@@ -3176,7 +3151,7 @@
           <a:p>
             <a:fld id="{96644B93-F9AB-49B6-8AE8-03D43A9E344C}" type="datetime1">
               <a:rPr lang="fr-FR" smtClean="0"/>
-              <a:t>30/03/2026</a:t>
+              <a:t>21/04/2026</a:t>
             </a:fld>
             <a:endParaRPr lang="fr-FR"/>
           </a:p>
@@ -3338,7 +3313,7 @@
           <a:p>
             <a:fld id="{96644B93-F9AB-49B6-8AE8-03D43A9E344C}" type="datetime1">
               <a:rPr lang="fr-FR" smtClean="0"/>
-              <a:t>30/03/2026</a:t>
+              <a:t>21/04/2026</a:t>
             </a:fld>
             <a:endParaRPr lang="fr-FR"/>
           </a:p>
@@ -10030,7 +10005,7 @@
               </a:lnSpc>
             </a:pPr>
             <a:r>
-              <a:rPr lang="en-US" sz="4000" cap="none" noProof="0">
+              <a:rPr lang="en-US" sz="4000" cap="none" noProof="0" dirty="0">
                 <a:solidFill>
                   <a:schemeClr val="bg1"/>
                 </a:solidFill>
@@ -10041,7 +10016,7 @@
               <a:t>STELLANTIS </a:t>
             </a:r>
             <a:r>
-              <a:rPr lang="en-US" sz="4000" cap="none">
+              <a:rPr lang="en-US" sz="4000" cap="none" dirty="0">
                 <a:solidFill>
                   <a:schemeClr val="bg1"/>
                 </a:solidFill>
@@ -10051,7 +10026,7 @@
               </a:rPr>
               <a:t>SPAIN</a:t>
             </a:r>
-            <a:endParaRPr lang="en-US" sz="4000" cap="none" noProof="0">
+            <a:endParaRPr lang="en-US" sz="4000" cap="none" noProof="0" dirty="0">
               <a:solidFill>
                 <a:schemeClr val="bg1"/>
               </a:solidFill>
@@ -10066,7 +10041,7 @@
                 <a:spcPct val="150000"/>
               </a:lnSpc>
             </a:pPr>
-            <a:endParaRPr lang="en-US" sz="4000" b="0" cap="none">
+            <a:endParaRPr lang="en-US" sz="4000" b="0" cap="none" dirty="0">
               <a:solidFill>
                 <a:schemeClr val="bg1"/>
               </a:solidFill>
@@ -10082,7 +10057,7 @@
               </a:lnSpc>
             </a:pPr>
             <a:r>
-              <a:rPr lang="en-US" sz="2400" b="1">
+              <a:rPr lang="en-US" sz="2400" b="1" dirty="0">
                 <a:solidFill>
                   <a:schemeClr val="bg1"/>
                 </a:solidFill>
@@ -10091,7 +10066,7 @@
               <a:t>Trade-in websites performance review December 2025– </a:t>
             </a:r>
             <a:r>
-              <a:rPr lang="en-US" sz="2400" b="1" err="1">
+              <a:rPr lang="en-US" sz="2400" b="1" dirty="0" err="1">
                 <a:solidFill>
                   <a:schemeClr val="bg1"/>
                 </a:solidFill>
@@ -10100,7 +10075,7 @@
               <a:t>spain</a:t>
             </a:r>
             <a:r>
-              <a:rPr lang="en-US" sz="2400" b="1">
+              <a:rPr lang="en-US" sz="2400" b="1" dirty="0">
                 <a:solidFill>
                   <a:schemeClr val="bg1"/>
                 </a:solidFill>
@@ -10108,7 +10083,7 @@
               </a:rPr>
               <a:t> </a:t>
             </a:r>
-            <a:endParaRPr lang="fr-FR" sz="2400" b="1">
+            <a:endParaRPr lang="fr-FR" sz="2400" b="1" dirty="0">
               <a:solidFill>
                 <a:schemeClr val="bg1"/>
               </a:solidFill>
@@ -28466,8 +28441,13 @@
             <a:pPr algn="ctr"/>
             <a:r>
               <a:rPr lang="fr-FR" dirty="0"/>
-              <a:t>PH_LKR_1</a:t>
-            </a:r>
+              <a:t>PH_</a:t>
+            </a:r>
+            <a:r>
+              <a:rPr lang="fr-FR"/>
+              <a:t>LKR_3</a:t>
+            </a:r>
+            <a:endParaRPr lang="fr-FR" dirty="0"/>
           </a:p>
         </p:txBody>
       </p:sp>
@@ -31184,7 +31164,7 @@
             <a:pPr algn="ctr"/>
             <a:r>
               <a:rPr lang="fr-FR" dirty="0"/>
-              <a:t>PH_LKR_1</a:t>
+              <a:t>PH_LKR_3</a:t>
             </a:r>
           </a:p>
         </p:txBody>
@@ -34444,7 +34424,7 @@
             <a:pPr algn="ctr"/>
             <a:r>
               <a:rPr lang="fr-FR" dirty="0"/>
-              <a:t>PH_LKR_1</a:t>
+              <a:t>PH_LKR_3</a:t>
             </a:r>
           </a:p>
         </p:txBody>
@@ -37162,7 +37142,7 @@
             <a:pPr algn="ctr"/>
             <a:r>
               <a:rPr lang="fr-FR" dirty="0"/>
-              <a:t>PH_LKR_1</a:t>
+              <a:t>PH_LKR_3</a:t>
             </a:r>
           </a:p>
         </p:txBody>
@@ -40562,7 +40542,7 @@
             <a:pPr algn="ctr"/>
             <a:r>
               <a:rPr lang="fr-FR" dirty="0"/>
-              <a:t>PH_LKR_1</a:t>
+              <a:t>PH_LKR_3</a:t>
             </a:r>
           </a:p>
         </p:txBody>
